--- a/Prompt/Jamba.pptx
+++ b/Prompt/Jamba.pptx
@@ -7,14 +7,15 @@
   <p:sldIdLst>
     <p:sldId id="256" r:id="rId2"/>
     <p:sldId id="258" r:id="rId3"/>
-    <p:sldId id="259" r:id="rId4"/>
-    <p:sldId id="260" r:id="rId5"/>
-    <p:sldId id="261" r:id="rId6"/>
-    <p:sldId id="262" r:id="rId7"/>
-    <p:sldId id="263" r:id="rId8"/>
-    <p:sldId id="264" r:id="rId9"/>
-    <p:sldId id="265" r:id="rId10"/>
-    <p:sldId id="266" r:id="rId11"/>
+    <p:sldId id="267" r:id="rId4"/>
+    <p:sldId id="259" r:id="rId5"/>
+    <p:sldId id="260" r:id="rId6"/>
+    <p:sldId id="261" r:id="rId7"/>
+    <p:sldId id="262" r:id="rId8"/>
+    <p:sldId id="263" r:id="rId9"/>
+    <p:sldId id="264" r:id="rId10"/>
+    <p:sldId id="265" r:id="rId11"/>
+    <p:sldId id="266" r:id="rId12"/>
   </p:sldIdLst>
   <p:sldSz cx="12192000" cy="6858000"/>
   <p:notesSz cx="6858000" cy="9144000"/>
@@ -113,6 +114,11 @@
       </a:defRPr>
     </a:lvl9pPr>
   </p:defaultTextStyle>
+  <p:extLst>
+    <p:ext uri="{EFAFB233-063F-42B5-8137-9DF3F51BA10A}">
+      <p15:sldGuideLst xmlns:p15="http://schemas.microsoft.com/office/powerpoint/2012/main"/>
+    </p:ext>
+  </p:extLst>
 </p:presentation>
 </file>
 
@@ -6199,6 +6205,210 @@
           <p:cNvPr id="2" name="Заголовок 1">
             <a:extLst>
               <a:ext uri="{FF2B5EF4-FFF2-40B4-BE49-F238E27FC236}">
+                <a16:creationId xmlns:a16="http://schemas.microsoft.com/office/drawing/2014/main" id="{AC35AFAD-3916-C0DA-F1D9-67066F9FF563}"/>
+              </a:ext>
+            </a:extLst>
+          </p:cNvPr>
+          <p:cNvSpPr>
+            <a:spLocks noGrp="1"/>
+          </p:cNvSpPr>
+          <p:nvPr>
+            <p:ph type="title"/>
+          </p:nvPr>
+        </p:nvSpPr>
+        <p:spPr>
+          <a:xfrm>
+            <a:off x="677334" y="609600"/>
+            <a:ext cx="8596668" cy="686540"/>
+          </a:xfrm>
+        </p:spPr>
+        <p:txBody>
+          <a:bodyPr/>
+          <a:lstStyle/>
+          <a:p>
+            <a:r>
+              <a:rPr lang="ru-RU" b="1" dirty="0"/>
+              <a:t>Где можно использовать </a:t>
+            </a:r>
+            <a:r>
+              <a:rPr lang="en-US" b="1" dirty="0"/>
+              <a:t>Jamba</a:t>
+            </a:r>
+            <a:endParaRPr lang="ru-RU" dirty="0"/>
+          </a:p>
+        </p:txBody>
+      </p:sp>
+      <p:sp>
+        <p:nvSpPr>
+          <p:cNvPr id="3" name="Объект 2">
+            <a:extLst>
+              <a:ext uri="{FF2B5EF4-FFF2-40B4-BE49-F238E27FC236}">
+                <a16:creationId xmlns:a16="http://schemas.microsoft.com/office/drawing/2014/main" id="{9666A396-9847-BD36-BC65-40ED63F68BFF}"/>
+              </a:ext>
+            </a:extLst>
+          </p:cNvPr>
+          <p:cNvSpPr>
+            <a:spLocks noGrp="1"/>
+          </p:cNvSpPr>
+          <p:nvPr>
+            <p:ph idx="1"/>
+          </p:nvPr>
+        </p:nvSpPr>
+        <p:spPr>
+          <a:xfrm>
+            <a:off x="677334" y="1393794"/>
+            <a:ext cx="8596668" cy="4854605"/>
+          </a:xfrm>
+        </p:spPr>
+        <p:txBody>
+          <a:bodyPr/>
+          <a:lstStyle/>
+          <a:p>
+            <a:pPr marL="0" indent="0">
+              <a:buNone/>
+            </a:pPr>
+            <a:r>
+              <a:rPr lang="ru-RU" sz="2400" dirty="0"/>
+              <a:t>Благодаря своей открытости, Jamba доступна на множестве платформ:</a:t>
+            </a:r>
+          </a:p>
+          <a:p>
+            <a:r>
+              <a:rPr lang="ru-RU" sz="2400" b="1" dirty="0"/>
+              <a:t>Прямая загрузка:</a:t>
+            </a:r>
+            <a:r>
+              <a:rPr lang="ru-RU" sz="2400" dirty="0"/>
+              <a:t> Модели можно скачать с портала </a:t>
+            </a:r>
+            <a:r>
+              <a:rPr lang="ru-RU" sz="2400" b="1" dirty="0" err="1"/>
+              <a:t>Hugging</a:t>
+            </a:r>
+            <a:r>
+              <a:rPr lang="ru-RU" sz="2400" b="1" dirty="0"/>
+              <a:t> Face</a:t>
+            </a:r>
+            <a:r>
+              <a:rPr lang="ru-RU" sz="2400" dirty="0"/>
+              <a:t> .</a:t>
+            </a:r>
+          </a:p>
+          <a:p>
+            <a:r>
+              <a:rPr lang="ru-RU" sz="2400" b="1" dirty="0"/>
+              <a:t>Облачные платформы:</a:t>
+            </a:r>
+            <a:r>
+              <a:rPr lang="ru-RU" sz="2400" dirty="0"/>
+              <a:t> Jamba интегрирована с ведущими облачными провайдерами, такими как </a:t>
+            </a:r>
+            <a:r>
+              <a:rPr lang="ru-RU" sz="2400" b="1" dirty="0"/>
+              <a:t>Microsoft Azure</a:t>
+            </a:r>
+            <a:r>
+              <a:rPr lang="ru-RU" sz="2400" dirty="0"/>
+              <a:t>, </a:t>
+            </a:r>
+            <a:r>
+              <a:rPr lang="ru-RU" sz="2400" b="1" dirty="0"/>
+              <a:t>Google </a:t>
+            </a:r>
+            <a:r>
+              <a:rPr lang="ru-RU" sz="2400" b="1" dirty="0" err="1"/>
+              <a:t>Cloud</a:t>
+            </a:r>
+            <a:r>
+              <a:rPr lang="ru-RU" sz="2400" b="1" dirty="0"/>
+              <a:t> </a:t>
+            </a:r>
+            <a:r>
+              <a:rPr lang="ru-RU" sz="2400" b="1" dirty="0" err="1"/>
+              <a:t>Vertex</a:t>
+            </a:r>
+            <a:r>
+              <a:rPr lang="ru-RU" sz="2400" b="1" dirty="0"/>
+              <a:t> AI</a:t>
+            </a:r>
+            <a:r>
+              <a:rPr lang="ru-RU" sz="2400" dirty="0"/>
+              <a:t>, и доступна в каталогах </a:t>
+            </a:r>
+            <a:r>
+              <a:rPr lang="ru-RU" sz="2400" b="1" dirty="0"/>
+              <a:t>Amazon </a:t>
+            </a:r>
+            <a:r>
+              <a:rPr lang="ru-RU" sz="2400" b="1" dirty="0" err="1"/>
+              <a:t>Bedrock</a:t>
+            </a:r>
+            <a:r>
+              <a:rPr lang="ru-RU" sz="2400" dirty="0"/>
+              <a:t> и </a:t>
+            </a:r>
+            <a:r>
+              <a:rPr lang="ru-RU" sz="2400" b="1" dirty="0"/>
+              <a:t>NVIDIA API</a:t>
+            </a:r>
+            <a:r>
+              <a:rPr lang="ru-RU" sz="2400" dirty="0"/>
+              <a:t> .</a:t>
+            </a:r>
+          </a:p>
+          <a:p>
+            <a:r>
+              <a:rPr lang="ru-RU" sz="2400" b="1" dirty="0"/>
+              <a:t>Собственная инфраструктура:</a:t>
+            </a:r>
+            <a:r>
+              <a:rPr lang="ru-RU" sz="2400" dirty="0"/>
+              <a:t> Благодаря лицензии Apache 2.0, вы можете развернуть модель на своих собственных серверах .</a:t>
+            </a:r>
+          </a:p>
+          <a:p>
+            <a:pPr marL="0" indent="0">
+              <a:buNone/>
+            </a:pPr>
+            <a:endParaRPr lang="ru-RU" dirty="0"/>
+          </a:p>
+        </p:txBody>
+      </p:sp>
+    </p:spTree>
+    <p:extLst>
+      <p:ext uri="{BB962C8B-B14F-4D97-AF65-F5344CB8AC3E}">
+        <p14:creationId xmlns:p14="http://schemas.microsoft.com/office/powerpoint/2010/main" val="2312120340"/>
+      </p:ext>
+    </p:extLst>
+  </p:cSld>
+  <p:clrMapOvr>
+    <a:masterClrMapping/>
+  </p:clrMapOvr>
+</p:sld>
+</file>
+
+<file path=ppt/slides/slide11.xml><?xml version="1.0" encoding="utf-8"?>
+<p:sld xmlns:a="http://schemas.openxmlformats.org/drawingml/2006/main" xmlns:r="http://schemas.openxmlformats.org/officeDocument/2006/relationships" xmlns:p="http://schemas.openxmlformats.org/presentationml/2006/main">
+  <p:cSld>
+    <p:spTree>
+      <p:nvGrpSpPr>
+        <p:cNvPr id="1" name=""/>
+        <p:cNvGrpSpPr/>
+        <p:nvPr/>
+      </p:nvGrpSpPr>
+      <p:grpSpPr>
+        <a:xfrm>
+          <a:off x="0" y="0"/>
+          <a:ext cx="0" cy="0"/>
+          <a:chOff x="0" y="0"/>
+          <a:chExt cx="0" cy="0"/>
+        </a:xfrm>
+      </p:grpSpPr>
+      <p:sp>
+        <p:nvSpPr>
+          <p:cNvPr id="2" name="Заголовок 1">
+            <a:extLst>
+              <a:ext uri="{FF2B5EF4-FFF2-40B4-BE49-F238E27FC236}">
                 <a16:creationId xmlns:a16="http://schemas.microsoft.com/office/drawing/2014/main" id="{3FDC4B36-9577-2D4C-9C95-11757CBB5C32}"/>
               </a:ext>
             </a:extLst>
@@ -6419,7 +6629,7 @@
           <p:cNvPr id="2" name="Заголовок 1">
             <a:extLst>
               <a:ext uri="{FF2B5EF4-FFF2-40B4-BE49-F238E27FC236}">
-                <a16:creationId xmlns:a16="http://schemas.microsoft.com/office/drawing/2014/main" id="{40F30C15-687F-6509-D70C-BB7061B365D0}"/>
+                <a16:creationId xmlns:a16="http://schemas.microsoft.com/office/drawing/2014/main" id="{ABDAC187-B46F-D4D2-4392-1DA493B6D0E6}"/>
               </a:ext>
             </a:extLst>
           </p:cNvPr>
@@ -6430,110 +6640,121 @@
             <p:ph type="title"/>
           </p:nvPr>
         </p:nvSpPr>
-        <p:spPr/>
+        <p:spPr>
+          <a:xfrm>
+            <a:off x="677334" y="609600"/>
+            <a:ext cx="8596668" cy="695417"/>
+          </a:xfrm>
+        </p:spPr>
+        <p:txBody>
+          <a:bodyPr/>
+          <a:lstStyle/>
+          <a:p>
+            <a:r>
+              <a:rPr lang="ru-RU" dirty="0"/>
+              <a:t>Кто такие </a:t>
+            </a:r>
+            <a:r>
+              <a:rPr lang="en-US" b="1" dirty="0"/>
+              <a:t>AI21 Labs</a:t>
+            </a:r>
+            <a:r>
+              <a:rPr lang="ru-RU" dirty="0"/>
+              <a:t>?</a:t>
+            </a:r>
+          </a:p>
+        </p:txBody>
+      </p:sp>
+      <p:sp>
+        <p:nvSpPr>
+          <p:cNvPr id="3" name="Объект 2">
+            <a:extLst>
+              <a:ext uri="{FF2B5EF4-FFF2-40B4-BE49-F238E27FC236}">
+                <a16:creationId xmlns:a16="http://schemas.microsoft.com/office/drawing/2014/main" id="{4147F78A-C1AF-D89E-A663-92295F1C9AE7}"/>
+              </a:ext>
+            </a:extLst>
+          </p:cNvPr>
+          <p:cNvSpPr>
+            <a:spLocks noGrp="1"/>
+          </p:cNvSpPr>
+          <p:nvPr>
+            <p:ph idx="1"/>
+          </p:nvPr>
+        </p:nvSpPr>
+        <p:spPr>
+          <a:xfrm>
+            <a:off x="677334" y="2041864"/>
+            <a:ext cx="8596668" cy="4206535"/>
+          </a:xfrm>
+        </p:spPr>
         <p:txBody>
           <a:bodyPr>
             <a:normAutofit/>
           </a:bodyPr>
           <a:lstStyle/>
           <a:p>
-            <a:r>
-              <a:rPr lang="ru-RU" b="1" dirty="0"/>
-              <a:t>Ключевая особенность: Гибридная архитектура Mamba-</a:t>
-            </a:r>
-            <a:r>
-              <a:rPr lang="ru-RU" b="1" dirty="0" err="1"/>
-              <a:t>Transformer</a:t>
-            </a:r>
-            <a:endParaRPr lang="ru-RU" dirty="0"/>
-          </a:p>
-        </p:txBody>
-      </p:sp>
-      <p:sp>
-        <p:nvSpPr>
-          <p:cNvPr id="3" name="Объект 2">
-            <a:extLst>
-              <a:ext uri="{FF2B5EF4-FFF2-40B4-BE49-F238E27FC236}">
-                <a16:creationId xmlns:a16="http://schemas.microsoft.com/office/drawing/2014/main" id="{1963290F-DB5E-8C15-5C78-27AB3C587829}"/>
-              </a:ext>
-            </a:extLst>
-          </p:cNvPr>
-          <p:cNvSpPr>
-            <a:spLocks noGrp="1"/>
-          </p:cNvSpPr>
-          <p:nvPr>
-            <p:ph idx="1"/>
-          </p:nvPr>
-        </p:nvSpPr>
-        <p:spPr/>
-        <p:txBody>
-          <a:bodyPr>
-            <a:normAutofit/>
-          </a:bodyPr>
-          <a:lstStyle/>
-          <a:p>
             <a:pPr marL="0" indent="0">
               <a:buNone/>
             </a:pPr>
             <a:r>
               <a:rPr lang="ru-RU" sz="2400" dirty="0"/>
-              <a:t>В основе Jamba лежит не просто чередование слоев, а тщательно спроектированная блочная структура, которая позволяет добиться впечатляющих результатов</a:t>
-            </a:r>
-          </a:p>
-          <a:p>
+              <a:t>Израильская компания </a:t>
+            </a:r>
             <a:r>
               <a:rPr lang="ru-RU" sz="2400" b="1" dirty="0"/>
-              <a:t>Сбалансированный блок:</a:t>
+              <a:t>AI21 Labs</a:t>
             </a:r>
             <a:r>
               <a:rPr lang="ru-RU" sz="2400" dirty="0"/>
-              <a:t> Каждый блок модели состоит из </a:t>
+              <a:t> основана в 2017 году в Тель-Авиве тремя специалистами: Амноном </a:t>
+            </a:r>
+            <a:r>
+              <a:rPr lang="ru-RU" sz="2400" dirty="0" err="1"/>
+              <a:t>Шашуа</a:t>
+            </a:r>
+            <a:r>
+              <a:rPr lang="ru-RU" sz="2400" dirty="0"/>
+              <a:t> (основатель </a:t>
+            </a:r>
+            <a:r>
+              <a:rPr lang="ru-RU" sz="2400" dirty="0" err="1"/>
+              <a:t>Mobileye</a:t>
+            </a:r>
+            <a:r>
+              <a:rPr lang="ru-RU" sz="2400" dirty="0"/>
+              <a:t>), профессором Стэнфорда Йоавом </a:t>
+            </a:r>
+            <a:r>
+              <a:rPr lang="ru-RU" sz="2400" dirty="0" err="1"/>
+              <a:t>Шохамом</a:t>
+            </a:r>
+            <a:r>
+              <a:rPr lang="ru-RU" sz="2400" dirty="0"/>
+              <a:t> и предпринимателем Ори </a:t>
+            </a:r>
+            <a:r>
+              <a:rPr lang="ru-RU" sz="2400" dirty="0" err="1"/>
+              <a:t>Гошеном</a:t>
+            </a:r>
+            <a:r>
+              <a:rPr lang="ru-RU" sz="2400" dirty="0"/>
+              <a:t>. Ключевые инвесторы — </a:t>
             </a:r>
             <a:r>
               <a:rPr lang="ru-RU" sz="2400" b="1" dirty="0"/>
-              <a:t>одного</a:t>
+              <a:t>Nvidia, Google и Intel Capital</a:t>
             </a:r>
             <a:r>
               <a:rPr lang="ru-RU" sz="2400" dirty="0"/>
-              <a:t> "тяжелого" </a:t>
-            </a:r>
-            <a:r>
-              <a:rPr lang="ru-RU" sz="2400" b="1" dirty="0"/>
-              <a:t>трансформер-слоя</a:t>
-            </a:r>
-            <a:r>
-              <a:rPr lang="ru-RU" sz="2400" dirty="0"/>
-              <a:t>, отвечающего за глубокое понимание и сложные рассуждения, и </a:t>
-            </a:r>
-            <a:r>
-              <a:rPr lang="ru-RU" sz="2400" b="1" dirty="0"/>
-              <a:t>семи</a:t>
-            </a:r>
-            <a:r>
-              <a:rPr lang="ru-RU" sz="2400" dirty="0"/>
-              <a:t> "легких" и быстрых </a:t>
-            </a:r>
-            <a:r>
-              <a:rPr lang="ru-RU" sz="2400" b="1" dirty="0"/>
-              <a:t>слоев Mamba (SSM)</a:t>
-            </a:r>
-            <a:r>
-              <a:rPr lang="ru-RU" sz="2400" dirty="0"/>
-              <a:t>, которые эффективно обрабатывают последовательности и распространяют информацию по длинному контексту.</a:t>
-            </a:r>
-          </a:p>
-          <a:p>
-            <a:pPr marL="0" indent="0">
-              <a:buNone/>
-            </a:pPr>
-            <a:endParaRPr lang="ru-RU" sz="2400" dirty="0"/>
+              <a:t>. В 2023 году стартап оценивался в $1,4 млрд. По данным на начало 2026 года, Nvidia ведёт переговоры о покупке компании за $2-3 млрд, проявляя интерес к её команде разработчиков.</a:t>
+            </a:r>
           </a:p>
         </p:txBody>
       </p:sp>
     </p:spTree>
     <p:extLst>
       <p:ext uri="{BB962C8B-B14F-4D97-AF65-F5344CB8AC3E}">
-        <p14:creationId xmlns:p14="http://schemas.microsoft.com/office/powerpoint/2010/main" val="1553440348"/>
+        <p14:creationId xmlns:p14="http://schemas.microsoft.com/office/powerpoint/2010/main" val="3059315532"/>
       </p:ext>
     </p:extLst>
   </p:cSld>
@@ -6565,7 +6786,7 @@
           <p:cNvPr id="2" name="Заголовок 1">
             <a:extLst>
               <a:ext uri="{FF2B5EF4-FFF2-40B4-BE49-F238E27FC236}">
-                <a16:creationId xmlns:a16="http://schemas.microsoft.com/office/drawing/2014/main" id="{2B607E3B-C5D1-66D2-4172-155A6E7C97E5}"/>
+                <a16:creationId xmlns:a16="http://schemas.microsoft.com/office/drawing/2014/main" id="{40F30C15-687F-6509-D70C-BB7061B365D0}"/>
               </a:ext>
             </a:extLst>
           </p:cNvPr>
@@ -6600,7 +6821,7 @@
           <p:cNvPr id="3" name="Объект 2">
             <a:extLst>
               <a:ext uri="{FF2B5EF4-FFF2-40B4-BE49-F238E27FC236}">
-                <a16:creationId xmlns:a16="http://schemas.microsoft.com/office/drawing/2014/main" id="{6DF9A3C9-B0FD-1F3C-D209-469FF7ECD99C}"/>
+                <a16:creationId xmlns:a16="http://schemas.microsoft.com/office/drawing/2014/main" id="{1963290F-DB5E-8C15-5C78-27AB3C587829}"/>
               </a:ext>
             </a:extLst>
           </p:cNvPr>
@@ -6618,55 +6839,68 @@
           </a:bodyPr>
           <a:lstStyle/>
           <a:p>
-            <a:r>
-              <a:rPr lang="ru-RU" sz="2000" b="1" dirty="0"/>
-              <a:t>Технология </a:t>
-            </a:r>
-            <a:r>
-              <a:rPr lang="ru-RU" sz="2000" b="1" dirty="0" err="1"/>
-              <a:t>Mixture-of-Experts</a:t>
-            </a:r>
-            <a:r>
-              <a:rPr lang="ru-RU" sz="2000" b="1" dirty="0"/>
-              <a:t> (</a:t>
-            </a:r>
-            <a:r>
-              <a:rPr lang="ru-RU" sz="2000" b="1" dirty="0" err="1"/>
-              <a:t>MoE</a:t>
-            </a:r>
-            <a:r>
-              <a:rPr lang="ru-RU" sz="2000" b="1" dirty="0"/>
-              <a:t>):</a:t>
-            </a:r>
-            <a:r>
-              <a:rPr lang="ru-RU" sz="2000" dirty="0"/>
-              <a:t> Внутри трансформер-слоев применяется архитектура "смеси экспертов". Например, в первых версиях Jamba при общем количестве параметров в 52 миллиарда, в каждый момент времени активно лишь около 12 миллиардов. Это достигается за счет того, что из 16 "экспертов" для обработки каждого токена выбираются только два лучших, что значительно ускоряет вычисления.</a:t>
-            </a:r>
-          </a:p>
-          <a:p>
-            <a:r>
-              <a:rPr lang="ru-RU" sz="2000" b="1" dirty="0"/>
-              <a:t>Огромный контекст:</a:t>
-            </a:r>
-            <a:r>
-              <a:rPr lang="ru-RU" sz="2000" dirty="0"/>
-              <a:t> Все модели семейства Jamba поддерживают контекст в </a:t>
-            </a:r>
-            <a:r>
-              <a:rPr lang="ru-RU" sz="2000" b="1" dirty="0"/>
-              <a:t>256 000 токенов</a:t>
-            </a:r>
-            <a:r>
-              <a:rPr lang="ru-RU" sz="2000" dirty="0"/>
-              <a:t>. Этого достаточно, чтобы единовременно обработать, например, книгу объемом около 400 страниц.</a:t>
-            </a:r>
+            <a:pPr marL="0" indent="0">
+              <a:buNone/>
+            </a:pPr>
+            <a:r>
+              <a:rPr lang="ru-RU" sz="2400" dirty="0"/>
+              <a:t>В основе Jamba лежит не просто чередование слоев, а тщательно спроектированная блочная структура, которая позволяет добиться впечатляющих результатов</a:t>
+            </a:r>
+          </a:p>
+          <a:p>
+            <a:r>
+              <a:rPr lang="ru-RU" sz="2400" b="1" dirty="0"/>
+              <a:t>Сбалансированный блок:</a:t>
+            </a:r>
+            <a:r>
+              <a:rPr lang="ru-RU" sz="2400" dirty="0"/>
+              <a:t> Каждый блок модели состоит из </a:t>
+            </a:r>
+            <a:r>
+              <a:rPr lang="ru-RU" sz="2400" b="1" dirty="0"/>
+              <a:t>одного</a:t>
+            </a:r>
+            <a:r>
+              <a:rPr lang="ru-RU" sz="2400" dirty="0"/>
+              <a:t> "тяжелого" </a:t>
+            </a:r>
+            <a:r>
+              <a:rPr lang="ru-RU" sz="2400" b="1" dirty="0"/>
+              <a:t>трансформер-слоя</a:t>
+            </a:r>
+            <a:r>
+              <a:rPr lang="ru-RU" sz="2400" dirty="0"/>
+              <a:t>, отвечающего за глубокое понимание и сложные рассуждения, и </a:t>
+            </a:r>
+            <a:r>
+              <a:rPr lang="ru-RU" sz="2400" b="1" dirty="0"/>
+              <a:t>семи</a:t>
+            </a:r>
+            <a:r>
+              <a:rPr lang="ru-RU" sz="2400" dirty="0"/>
+              <a:t> "легких" и быстрых </a:t>
+            </a:r>
+            <a:r>
+              <a:rPr lang="ru-RU" sz="2400" b="1" dirty="0"/>
+              <a:t>слоев Mamba (SSM)</a:t>
+            </a:r>
+            <a:r>
+              <a:rPr lang="ru-RU" sz="2400" dirty="0"/>
+              <a:t>, которые эффективно обрабатывают последовательности и распространяют информацию по длинному контексту.</a:t>
+            </a:r>
+          </a:p>
+          <a:p>
+            <a:pPr marL="0" indent="0">
+              <a:buNone/>
+            </a:pPr>
+            <a:endParaRPr lang="ru-RU" sz="2400" dirty="0"/>
           </a:p>
         </p:txBody>
       </p:sp>
     </p:spTree>
     <p:extLst>
       <p:ext uri="{BB962C8B-B14F-4D97-AF65-F5344CB8AC3E}">
-        <p14:creationId xmlns:p14="http://schemas.microsoft.com/office/powerpoint/2010/main" val="1389416920"/>
+        <p14:creationId xmlns:p14="http://schemas.microsoft.com/office/powerpoint/2010/main" val="1553440348"/>
       </p:ext>
     </p:extLst>
   </p:cSld>
@@ -6698,7 +6932,7 @@
           <p:cNvPr id="2" name="Заголовок 1">
             <a:extLst>
               <a:ext uri="{FF2B5EF4-FFF2-40B4-BE49-F238E27FC236}">
-                <a16:creationId xmlns:a16="http://schemas.microsoft.com/office/drawing/2014/main" id="{D0B2587B-DC38-F243-0564-B5FB6C7B570E}"/>
+                <a16:creationId xmlns:a16="http://schemas.microsoft.com/office/drawing/2014/main" id="{2B607E3B-C5D1-66D2-4172-155A6E7C97E5}"/>
               </a:ext>
             </a:extLst>
           </p:cNvPr>
@@ -6711,16 +6945,18 @@
         </p:nvSpPr>
         <p:spPr/>
         <p:txBody>
-          <a:bodyPr/>
+          <a:bodyPr>
+            <a:normAutofit/>
+          </a:bodyPr>
           <a:lstStyle/>
           <a:p>
             <a:r>
               <a:rPr lang="ru-RU" b="1" dirty="0"/>
-              <a:t>Семейство моделей </a:t>
-            </a:r>
-            <a:r>
-              <a:rPr lang="en-US" b="1" dirty="0"/>
-              <a:t>Jamba</a:t>
+              <a:t>Ключевая особенность: Гибридная архитектура Mamba-</a:t>
+            </a:r>
+            <a:r>
+              <a:rPr lang="ru-RU" b="1" dirty="0" err="1"/>
+              <a:t>Transformer</a:t>
             </a:r>
             <a:endParaRPr lang="ru-RU" dirty="0"/>
           </a:p>
@@ -6731,7 +6967,7 @@
           <p:cNvPr id="3" name="Объект 2">
             <a:extLst>
               <a:ext uri="{FF2B5EF4-FFF2-40B4-BE49-F238E27FC236}">
-                <a16:creationId xmlns:a16="http://schemas.microsoft.com/office/drawing/2014/main" id="{0C864AE0-AA6B-8929-5F71-312B7C4E8BE8}"/>
+                <a16:creationId xmlns:a16="http://schemas.microsoft.com/office/drawing/2014/main" id="{6DF9A3C9-B0FD-1F3C-D209-469FF7ECD99C}"/>
               </a:ext>
             </a:extLst>
           </p:cNvPr>
@@ -6742,64 +6978,54 @@
             <p:ph idx="1"/>
           </p:nvPr>
         </p:nvSpPr>
-        <p:spPr>
-          <a:xfrm>
-            <a:off x="677334" y="1930401"/>
-            <a:ext cx="8596668" cy="4318000"/>
-          </a:xfrm>
-        </p:spPr>
+        <p:spPr/>
         <p:txBody>
           <a:bodyPr>
             <a:normAutofit/>
           </a:bodyPr>
           <a:lstStyle/>
           <a:p>
-            <a:pPr marL="0" indent="0">
-              <a:buNone/>
-            </a:pPr>
-            <a:r>
-              <a:rPr lang="ru-RU" sz="2400" b="1" dirty="0"/>
-              <a:t>AI21 Labs </a:t>
-            </a:r>
-            <a:r>
-              <a:rPr lang="ru-RU" sz="2400" dirty="0"/>
-              <a:t>развивает линейку моделей, ориентируясь на разные задачи — от компактных решений для устройств до мощных моделей для сложных корпоративных сценариев.</a:t>
-            </a:r>
-          </a:p>
-          <a:p>
-            <a:r>
-              <a:rPr lang="en-US" sz="2400" b="1" dirty="0"/>
-              <a:t>Jamba-v0.1</a:t>
-            </a:r>
-            <a:r>
-              <a:rPr lang="ru-RU" sz="2400" b="1" dirty="0"/>
-              <a:t> </a:t>
-            </a:r>
-            <a:r>
-              <a:rPr lang="ru-RU" sz="2400" dirty="0"/>
-              <a:t>Первая модель семейства, заложившая основу гибридной архитектуры.</a:t>
-            </a:r>
-          </a:p>
-          <a:p>
-            <a:r>
-              <a:rPr lang="en-US" sz="2400" b="1" dirty="0"/>
-              <a:t>Jamba 1.5 Mini &amp; Large</a:t>
-            </a:r>
-            <a:r>
-              <a:rPr lang="ru-RU" sz="2400" b="1" dirty="0"/>
-              <a:t> </a:t>
-            </a:r>
-            <a:r>
-              <a:rPr lang="ru-RU" sz="2400" dirty="0"/>
-              <a:t>Обновленное семейство с улучшенной производительностью и поддержкой 9 языков. Mini: 12B активных параметров. </a:t>
-            </a:r>
-            <a:r>
-              <a:rPr lang="ru-RU" sz="2400" dirty="0" err="1"/>
-              <a:t>Large</a:t>
-            </a:r>
-            <a:r>
-              <a:rPr lang="ru-RU" sz="2400" dirty="0"/>
-              <a:t>: 94B активных параметров.</a:t>
+            <a:r>
+              <a:rPr lang="ru-RU" sz="2000" b="1" dirty="0"/>
+              <a:t>Технология </a:t>
+            </a:r>
+            <a:r>
+              <a:rPr lang="ru-RU" sz="2000" b="1" dirty="0" err="1"/>
+              <a:t>Mixture-of-Experts</a:t>
+            </a:r>
+            <a:r>
+              <a:rPr lang="ru-RU" sz="2000" b="1" dirty="0"/>
+              <a:t> (</a:t>
+            </a:r>
+            <a:r>
+              <a:rPr lang="ru-RU" sz="2000" b="1" dirty="0" err="1"/>
+              <a:t>MoE</a:t>
+            </a:r>
+            <a:r>
+              <a:rPr lang="ru-RU" sz="2000" b="1" dirty="0"/>
+              <a:t>):</a:t>
+            </a:r>
+            <a:r>
+              <a:rPr lang="ru-RU" sz="2000" dirty="0"/>
+              <a:t> Внутри трансформер-слоев применяется архитектура "смеси экспертов". Например, в первых версиях Jamba при общем количестве параметров в 52 миллиарда, в каждый момент времени активно лишь около 12 миллиардов. Это достигается за счет того, что из 16 "экспертов" для обработки каждого токена выбираются только два лучших, что значительно ускоряет вычисления.</a:t>
+            </a:r>
+          </a:p>
+          <a:p>
+            <a:r>
+              <a:rPr lang="ru-RU" sz="2000" b="1" dirty="0"/>
+              <a:t>Огромный контекст:</a:t>
+            </a:r>
+            <a:r>
+              <a:rPr lang="ru-RU" sz="2000" dirty="0"/>
+              <a:t> Все модели семейства Jamba поддерживают контекст в </a:t>
+            </a:r>
+            <a:r>
+              <a:rPr lang="ru-RU" sz="2000" b="1" dirty="0"/>
+              <a:t>256 000 токенов</a:t>
+            </a:r>
+            <a:r>
+              <a:rPr lang="ru-RU" sz="2000" dirty="0"/>
+              <a:t>. Этого достаточно, чтобы единовременно обработать, например, книгу объемом около 400 страниц.</a:t>
             </a:r>
           </a:p>
         </p:txBody>
@@ -6807,7 +7033,7 @@
     </p:spTree>
     <p:extLst>
       <p:ext uri="{BB962C8B-B14F-4D97-AF65-F5344CB8AC3E}">
-        <p14:creationId xmlns:p14="http://schemas.microsoft.com/office/powerpoint/2010/main" val="1893079227"/>
+        <p14:creationId xmlns:p14="http://schemas.microsoft.com/office/powerpoint/2010/main" val="1389416920"/>
       </p:ext>
     </p:extLst>
   </p:cSld>
@@ -6839,7 +7065,7 @@
           <p:cNvPr id="2" name="Заголовок 1">
             <a:extLst>
               <a:ext uri="{FF2B5EF4-FFF2-40B4-BE49-F238E27FC236}">
-                <a16:creationId xmlns:a16="http://schemas.microsoft.com/office/drawing/2014/main" id="{8B8367F1-2BFA-CFB2-F2B5-02489F3A2953}"/>
+                <a16:creationId xmlns:a16="http://schemas.microsoft.com/office/drawing/2014/main" id="{D0B2587B-DC38-F243-0564-B5FB6C7B570E}"/>
               </a:ext>
             </a:extLst>
           </p:cNvPr>
@@ -6872,7 +7098,7 @@
           <p:cNvPr id="3" name="Объект 2">
             <a:extLst>
               <a:ext uri="{FF2B5EF4-FFF2-40B4-BE49-F238E27FC236}">
-                <a16:creationId xmlns:a16="http://schemas.microsoft.com/office/drawing/2014/main" id="{89234C3E-0B12-8CBE-B7B7-955EAAF9576D}"/>
+                <a16:creationId xmlns:a16="http://schemas.microsoft.com/office/drawing/2014/main" id="{0C864AE0-AA6B-8929-5F71-312B7C4E8BE8}"/>
               </a:ext>
             </a:extLst>
           </p:cNvPr>
@@ -6885,19 +7111,32 @@
         </p:nvSpPr>
         <p:spPr>
           <a:xfrm>
-            <a:off x="677334" y="1642369"/>
-            <a:ext cx="8596668" cy="4606031"/>
+            <a:off x="677334" y="1930401"/>
+            <a:ext cx="8596668" cy="4318000"/>
           </a:xfrm>
         </p:spPr>
         <p:txBody>
           <a:bodyPr>
-            <a:normAutofit lnSpcReduction="10000"/>
+            <a:normAutofit/>
           </a:bodyPr>
           <a:lstStyle/>
           <a:p>
+            <a:pPr marL="0" indent="0">
+              <a:buNone/>
+            </a:pPr>
+            <a:r>
+              <a:rPr lang="ru-RU" sz="2400" b="1" dirty="0"/>
+              <a:t>AI21 Labs </a:t>
+            </a:r>
+            <a:r>
+              <a:rPr lang="ru-RU" sz="2400" dirty="0"/>
+              <a:t>развивает линейку моделей, ориентируясь на разные задачи — от компактных решений для устройств до мощных моделей для сложных корпоративных сценариев.</a:t>
+            </a:r>
+          </a:p>
+          <a:p>
             <a:r>
               <a:rPr lang="en-US" sz="2400" b="1" dirty="0"/>
-              <a:t>Jamba Reasoning 3B</a:t>
+              <a:t>Jamba-v0.1</a:t>
             </a:r>
             <a:r>
               <a:rPr lang="ru-RU" sz="2400" b="1" dirty="0"/>
@@ -6905,28 +7144,13 @@
             </a:r>
             <a:r>
               <a:rPr lang="ru-RU" sz="2400" dirty="0"/>
-              <a:t>Компактная "карманная" модель для выполнения задач на самих устройствах </a:t>
-            </a:r>
-            <a:br>
-              <a:rPr lang="ru-RU" sz="2400" dirty="0"/>
-            </a:br>
-            <a:r>
-              <a:rPr lang="ru-RU" sz="2400" dirty="0"/>
-              <a:t>(</a:t>
-            </a:r>
-            <a:r>
-              <a:rPr lang="ru-RU" sz="2400" dirty="0" err="1"/>
-              <a:t>on-device</a:t>
-            </a:r>
-            <a:r>
-              <a:rPr lang="ru-RU" sz="2400" dirty="0"/>
-              <a:t>). Параметры: 3B.</a:t>
+              <a:t>Первая модель семейства, заложившая основу гибридной архитектуры.</a:t>
             </a:r>
           </a:p>
           <a:p>
             <a:r>
               <a:rPr lang="en-US" sz="2400" b="1" dirty="0"/>
-              <a:t>Jamba2 3B &amp; Mini</a:t>
+              <a:t>Jamba 1.5 Mini &amp; Large</a:t>
             </a:r>
             <a:r>
               <a:rPr lang="ru-RU" sz="2400" b="1" dirty="0"/>
@@ -6934,46 +7158,15 @@
             </a:r>
             <a:r>
               <a:rPr lang="ru-RU" sz="2400" dirty="0"/>
-              <a:t>Новое поколение моделей (Jamba2), нацеленное на максимальную надежность и управляемость для корпоративных решений.</a:t>
-            </a:r>
-          </a:p>
-          <a:p>
-            <a:r>
-              <a:rPr lang="en-US" sz="2400" b="1" dirty="0"/>
-              <a:t>Jamba Large 1.7</a:t>
-            </a:r>
-            <a:r>
-              <a:rPr lang="ru-RU" sz="2400" b="1" dirty="0"/>
-              <a:t> </a:t>
+              <a:t>Обновленное семейство с улучшенной производительностью и поддержкой 9 языков. Mini: 12B активных параметров. </a:t>
+            </a:r>
+            <a:r>
+              <a:rPr lang="ru-RU" sz="2400" dirty="0" err="1"/>
+              <a:t>Large</a:t>
             </a:r>
             <a:r>
               <a:rPr lang="ru-RU" sz="2400" dirty="0"/>
-              <a:t>Улучшенная версия с акцентом на точность фактов (</a:t>
-            </a:r>
-            <a:r>
-              <a:rPr lang="ru-RU" sz="2400" dirty="0" err="1"/>
-              <a:t>grounding</a:t>
-            </a:r>
-            <a:r>
-              <a:rPr lang="ru-RU" sz="2400" dirty="0"/>
-              <a:t>) и следование инструкциям.</a:t>
-            </a:r>
-          </a:p>
-          <a:p>
-            <a:pPr marL="0" indent="0">
-              <a:buNone/>
-            </a:pPr>
-            <a:r>
-              <a:rPr lang="ru-RU" sz="2400" dirty="0"/>
-              <a:t>Все модели семейства Jamba распространяются под открытой лицензией </a:t>
-            </a:r>
-            <a:r>
-              <a:rPr lang="ru-RU" sz="2400" b="1" dirty="0"/>
-              <a:t>Apache 2.0</a:t>
-            </a:r>
-            <a:r>
-              <a:rPr lang="ru-RU" sz="2400" dirty="0"/>
-              <a:t>, что означает свободу их использования в коммерческих и исследовательских целях.</a:t>
+              <a:t>: 94B активных параметров.</a:t>
             </a:r>
           </a:p>
         </p:txBody>
@@ -6981,7 +7174,7 @@
     </p:spTree>
     <p:extLst>
       <p:ext uri="{BB962C8B-B14F-4D97-AF65-F5344CB8AC3E}">
-        <p14:creationId xmlns:p14="http://schemas.microsoft.com/office/powerpoint/2010/main" val="73693080"/>
+        <p14:creationId xmlns:p14="http://schemas.microsoft.com/office/powerpoint/2010/main" val="1893079227"/>
       </p:ext>
     </p:extLst>
   </p:cSld>
@@ -7013,7 +7206,7 @@
           <p:cNvPr id="2" name="Заголовок 1">
             <a:extLst>
               <a:ext uri="{FF2B5EF4-FFF2-40B4-BE49-F238E27FC236}">
-                <a16:creationId xmlns:a16="http://schemas.microsoft.com/office/drawing/2014/main" id="{FF7D253B-3DEC-633F-455B-315D437DE3EF}"/>
+                <a16:creationId xmlns:a16="http://schemas.microsoft.com/office/drawing/2014/main" id="{8B8367F1-2BFA-CFB2-F2B5-02489F3A2953}"/>
               </a:ext>
             </a:extLst>
           </p:cNvPr>
@@ -7031,7 +7224,11 @@
           <a:p>
             <a:r>
               <a:rPr lang="ru-RU" b="1" dirty="0"/>
-              <a:t>Ключевые преимущества</a:t>
+              <a:t>Семейство моделей </a:t>
+            </a:r>
+            <a:r>
+              <a:rPr lang="en-US" b="1" dirty="0"/>
+              <a:t>Jamba</a:t>
             </a:r>
             <a:endParaRPr lang="ru-RU" dirty="0"/>
           </a:p>
@@ -7042,7 +7239,7 @@
           <p:cNvPr id="3" name="Объект 2">
             <a:extLst>
               <a:ext uri="{FF2B5EF4-FFF2-40B4-BE49-F238E27FC236}">
-                <a16:creationId xmlns:a16="http://schemas.microsoft.com/office/drawing/2014/main" id="{F11BFD29-1C72-A39C-A3B6-F783B60C1939}"/>
+                <a16:creationId xmlns:a16="http://schemas.microsoft.com/office/drawing/2014/main" id="{89234C3E-0B12-8CBE-B7B7-955EAAF9576D}"/>
               </a:ext>
             </a:extLst>
           </p:cNvPr>
@@ -7055,66 +7252,95 @@
         </p:nvSpPr>
         <p:spPr>
           <a:xfrm>
-            <a:off x="677334" y="1509204"/>
-            <a:ext cx="8596668" cy="4651900"/>
+            <a:off x="677334" y="1642369"/>
+            <a:ext cx="8596668" cy="4606031"/>
           </a:xfrm>
         </p:spPr>
         <p:txBody>
           <a:bodyPr>
-            <a:noAutofit/>
+            <a:normAutofit lnSpcReduction="10000"/>
           </a:bodyPr>
           <a:lstStyle/>
           <a:p>
+            <a:r>
+              <a:rPr lang="en-US" sz="2400" b="1" dirty="0"/>
+              <a:t>Jamba Reasoning 3B</a:t>
+            </a:r>
+            <a:r>
+              <a:rPr lang="ru-RU" sz="2400" b="1" dirty="0"/>
+              <a:t> </a:t>
+            </a:r>
+            <a:r>
+              <a:rPr lang="ru-RU" sz="2400" dirty="0"/>
+              <a:t>Компактная "карманная" модель для выполнения задач на самих устройствах </a:t>
+            </a:r>
+            <a:br>
+              <a:rPr lang="ru-RU" sz="2400" dirty="0"/>
+            </a:br>
+            <a:r>
+              <a:rPr lang="ru-RU" sz="2400" dirty="0"/>
+              <a:t>(</a:t>
+            </a:r>
+            <a:r>
+              <a:rPr lang="ru-RU" sz="2400" dirty="0" err="1"/>
+              <a:t>on-device</a:t>
+            </a:r>
+            <a:r>
+              <a:rPr lang="ru-RU" sz="2400" dirty="0"/>
+              <a:t>). Параметры: 3B.</a:t>
+            </a:r>
+          </a:p>
+          <a:p>
+            <a:r>
+              <a:rPr lang="en-US" sz="2400" b="1" dirty="0"/>
+              <a:t>Jamba2 3B &amp; Mini</a:t>
+            </a:r>
+            <a:r>
+              <a:rPr lang="ru-RU" sz="2400" b="1" dirty="0"/>
+              <a:t> </a:t>
+            </a:r>
+            <a:r>
+              <a:rPr lang="ru-RU" sz="2400" dirty="0"/>
+              <a:t>Новое поколение моделей (Jamba2), нацеленное на максимальную надежность и управляемость для корпоративных решений.</a:t>
+            </a:r>
+          </a:p>
+          <a:p>
+            <a:r>
+              <a:rPr lang="en-US" sz="2400" b="1" dirty="0"/>
+              <a:t>Jamba Large 1.7</a:t>
+            </a:r>
+            <a:r>
+              <a:rPr lang="ru-RU" sz="2400" b="1" dirty="0"/>
+              <a:t> </a:t>
+            </a:r>
+            <a:r>
+              <a:rPr lang="ru-RU" sz="2400" dirty="0"/>
+              <a:t>Улучшенная версия с акцентом на точность фактов (</a:t>
+            </a:r>
+            <a:r>
+              <a:rPr lang="ru-RU" sz="2400" dirty="0" err="1"/>
+              <a:t>grounding</a:t>
+            </a:r>
+            <a:r>
+              <a:rPr lang="ru-RU" sz="2400" dirty="0"/>
+              <a:t>) и следование инструкциям.</a:t>
+            </a:r>
+          </a:p>
+          <a:p>
             <a:pPr marL="0" indent="0">
               <a:buNone/>
             </a:pPr>
             <a:r>
-              <a:rPr lang="ru-RU" sz="2200" dirty="0"/>
-              <a:t>Благодаря своей архитектуре, Jamba предлагает ряд важных преимуществ для бизнеса и разработчиков:</a:t>
-            </a:r>
-          </a:p>
-          <a:p>
-            <a:r>
-              <a:rPr lang="ru-RU" sz="2200" b="1" dirty="0"/>
-              <a:t>Высочайшая эффективность:</a:t>
-            </a:r>
-            <a:r>
-              <a:rPr lang="ru-RU" sz="2200" dirty="0"/>
-              <a:t> Обеспечивает значительно более высокую скорость обработки (до 3 раз выше) по сравнению с чисто </a:t>
-            </a:r>
-            <a:r>
-              <a:rPr lang="ru-RU" sz="2200" dirty="0" err="1"/>
-              <a:t>трансформерными</a:t>
-            </a:r>
-            <a:r>
-              <a:rPr lang="ru-RU" sz="2200" dirty="0"/>
-              <a:t> моделями аналогичного размера, особенно на длинных контекстах. Это позволяет экономить вычислительные ресурсы и снижать стоимость </a:t>
-            </a:r>
-            <a:r>
-              <a:rPr lang="ru-RU" sz="2200" dirty="0" err="1"/>
-              <a:t>инференса</a:t>
-            </a:r>
-            <a:r>
-              <a:rPr lang="ru-RU" sz="2200" dirty="0"/>
-              <a:t>.</a:t>
-            </a:r>
-          </a:p>
-          <a:p>
-            <a:r>
-              <a:rPr lang="ru-RU" sz="2200" b="1" dirty="0"/>
-              <a:t>Надежность и точность:</a:t>
-            </a:r>
-            <a:r>
-              <a:rPr lang="ru-RU" sz="2200" dirty="0"/>
-              <a:t> Модели семейства, особенно Jamba2, показывают высокие результаты в бенчмарках на следование инструкциям и привязку к фактам (</a:t>
-            </a:r>
-            <a:r>
-              <a:rPr lang="ru-RU" sz="2200" dirty="0" err="1"/>
-              <a:t>grounding</a:t>
-            </a:r>
-            <a:r>
-              <a:rPr lang="ru-RU" sz="2200" dirty="0"/>
-              <a:t>), что критически важно для корпоративных приложений, где недопустимы "галлюцинации".</a:t>
+              <a:rPr lang="ru-RU" sz="2400" dirty="0"/>
+              <a:t>Все модели семейства Jamba распространяются под открытой лицензией </a:t>
+            </a:r>
+            <a:r>
+              <a:rPr lang="ru-RU" sz="2400" b="1" dirty="0"/>
+              <a:t>Apache 2.0</a:t>
+            </a:r>
+            <a:r>
+              <a:rPr lang="ru-RU" sz="2400" dirty="0"/>
+              <a:t>, что означает свободу их использования в коммерческих и исследовательских целях.</a:t>
             </a:r>
           </a:p>
         </p:txBody>
@@ -7122,7 +7348,7 @@
     </p:spTree>
     <p:extLst>
       <p:ext uri="{BB962C8B-B14F-4D97-AF65-F5344CB8AC3E}">
-        <p14:creationId xmlns:p14="http://schemas.microsoft.com/office/powerpoint/2010/main" val="3509252525"/>
+        <p14:creationId xmlns:p14="http://schemas.microsoft.com/office/powerpoint/2010/main" val="73693080"/>
       </p:ext>
     </p:extLst>
   </p:cSld>
@@ -7154,7 +7380,7 @@
           <p:cNvPr id="2" name="Заголовок 1">
             <a:extLst>
               <a:ext uri="{FF2B5EF4-FFF2-40B4-BE49-F238E27FC236}">
-                <a16:creationId xmlns:a16="http://schemas.microsoft.com/office/drawing/2014/main" id="{A3FF5A66-2E21-D0BD-DF14-6789E8FB1D28}"/>
+                <a16:creationId xmlns:a16="http://schemas.microsoft.com/office/drawing/2014/main" id="{FF7D253B-3DEC-633F-455B-315D437DE3EF}"/>
               </a:ext>
             </a:extLst>
           </p:cNvPr>
@@ -7165,12 +7391,7 @@
             <p:ph type="title"/>
           </p:nvPr>
         </p:nvSpPr>
-        <p:spPr>
-          <a:xfrm>
-            <a:off x="677334" y="609600"/>
-            <a:ext cx="8596668" cy="757561"/>
-          </a:xfrm>
-        </p:spPr>
+        <p:spPr/>
         <p:txBody>
           <a:bodyPr/>
           <a:lstStyle/>
@@ -7188,7 +7409,7 @@
           <p:cNvPr id="3" name="Объект 2">
             <a:extLst>
               <a:ext uri="{FF2B5EF4-FFF2-40B4-BE49-F238E27FC236}">
-                <a16:creationId xmlns:a16="http://schemas.microsoft.com/office/drawing/2014/main" id="{46FC2F49-9872-95FB-DC49-C632AD60DCE2}"/>
+                <a16:creationId xmlns:a16="http://schemas.microsoft.com/office/drawing/2014/main" id="{F11BFD29-1C72-A39C-A3B6-F783B60C1939}"/>
               </a:ext>
             </a:extLst>
           </p:cNvPr>
@@ -7201,8 +7422,8 @@
         </p:nvSpPr>
         <p:spPr>
           <a:xfrm>
-            <a:off x="677334" y="1464817"/>
-            <a:ext cx="8596668" cy="4918228"/>
+            <a:off x="677334" y="1509204"/>
+            <a:ext cx="8596668" cy="4651900"/>
           </a:xfrm>
         </p:spPr>
         <p:txBody>
@@ -7211,39 +7432,56 @@
           </a:bodyPr>
           <a:lstStyle/>
           <a:p>
-            <a:r>
-              <a:rPr lang="ru-RU" sz="2400" b="1" dirty="0"/>
-              <a:t>Безопасность и конфиденциальность:</a:t>
-            </a:r>
-            <a:r>
-              <a:rPr lang="ru-RU" sz="2400" dirty="0"/>
-              <a:t> Возможность запускать модель в собственной инфраструктуре (</a:t>
-            </a:r>
-            <a:r>
-              <a:rPr lang="ru-RU" sz="2400" dirty="0" err="1"/>
-              <a:t>on-premises</a:t>
-            </a:r>
-            <a:r>
-              <a:rPr lang="ru-RU" sz="2400" dirty="0"/>
-              <a:t>) гарантирует, что корпоративные данные не покинут периметр компании.</a:t>
-            </a:r>
-          </a:p>
-          <a:p>
-            <a:r>
-              <a:rPr lang="ru-RU" sz="2400" b="1" dirty="0"/>
-              <a:t>Универсальность:</a:t>
-            </a:r>
-            <a:r>
-              <a:rPr lang="ru-RU" sz="2400" dirty="0"/>
-              <a:t> Jamba подходит для широчайшего круга задач: от анализа многотомной документации и юридических контрактов до создания ИИ-ассистентов и обработки запросов в контакт-центрах. Компактные версии, такие как Jamba </a:t>
-            </a:r>
-            <a:r>
-              <a:rPr lang="ru-RU" sz="2400" dirty="0" err="1"/>
-              <a:t>Reasoning</a:t>
-            </a:r>
-            <a:r>
-              <a:rPr lang="ru-RU" sz="2400" dirty="0"/>
-              <a:t> 3B, открывают эру децентрализованного ИИ, выполняя множество задач прямо на смартфонах и компьютерах пользователей, обращаясь к большим моделям в облаке только для самых сложных случаев.</a:t>
+            <a:pPr marL="0" indent="0">
+              <a:buNone/>
+            </a:pPr>
+            <a:r>
+              <a:rPr lang="ru-RU" sz="2200" dirty="0"/>
+              <a:t>Благодаря своей архитектуре, Jamba предлагает ряд важных преимуществ для бизнеса и разработчиков:</a:t>
+            </a:r>
+          </a:p>
+          <a:p>
+            <a:r>
+              <a:rPr lang="ru-RU" sz="2200" b="1" dirty="0"/>
+              <a:t>Высочайшая эффективность:</a:t>
+            </a:r>
+            <a:r>
+              <a:rPr lang="ru-RU" sz="2200" dirty="0"/>
+              <a:t> Обеспечивает значительно более высокую скорость обработки (до 3 раз выше) по сравнению с чисто </a:t>
+            </a:r>
+            <a:r>
+              <a:rPr lang="ru-RU" sz="2200" dirty="0" err="1"/>
+              <a:t>трансформерными</a:t>
+            </a:r>
+            <a:r>
+              <a:rPr lang="ru-RU" sz="2200" dirty="0"/>
+              <a:t> моделями аналогичного размера, особенно на длинных контекстах. Это позволяет экономить вычислительные ресурсы и снижать стоимость </a:t>
+            </a:r>
+            <a:r>
+              <a:rPr lang="ru-RU" sz="2200" dirty="0" err="1"/>
+              <a:t>инференса</a:t>
+            </a:r>
+            <a:r>
+              <a:rPr lang="ru-RU" sz="2200" dirty="0"/>
+              <a:t>.</a:t>
+            </a:r>
+          </a:p>
+          <a:p>
+            <a:r>
+              <a:rPr lang="ru-RU" sz="2200" b="1" dirty="0"/>
+              <a:t>Надежность и точность:</a:t>
+            </a:r>
+            <a:r>
+              <a:rPr lang="ru-RU" sz="2200" dirty="0"/>
+              <a:t> Модели семейства, особенно Jamba2, показывают высокие результаты в бенчмарках на следование инструкциям и привязку к фактам (</a:t>
+            </a:r>
+            <a:r>
+              <a:rPr lang="ru-RU" sz="2200" dirty="0" err="1"/>
+              <a:t>grounding</a:t>
+            </a:r>
+            <a:r>
+              <a:rPr lang="ru-RU" sz="2200" dirty="0"/>
+              <a:t>), что критически важно для корпоративных приложений, где недопустимы "галлюцинации".</a:t>
             </a:r>
           </a:p>
         </p:txBody>
@@ -7251,7 +7489,7 @@
     </p:spTree>
     <p:extLst>
       <p:ext uri="{BB962C8B-B14F-4D97-AF65-F5344CB8AC3E}">
-        <p14:creationId xmlns:p14="http://schemas.microsoft.com/office/powerpoint/2010/main" val="719343752"/>
+        <p14:creationId xmlns:p14="http://schemas.microsoft.com/office/powerpoint/2010/main" val="3509252525"/>
       </p:ext>
     </p:extLst>
   </p:cSld>
@@ -7283,7 +7521,7 @@
           <p:cNvPr id="2" name="Заголовок 1">
             <a:extLst>
               <a:ext uri="{FF2B5EF4-FFF2-40B4-BE49-F238E27FC236}">
-                <a16:creationId xmlns:a16="http://schemas.microsoft.com/office/drawing/2014/main" id="{AC35AFAD-3916-C0DA-F1D9-67066F9FF563}"/>
+                <a16:creationId xmlns:a16="http://schemas.microsoft.com/office/drawing/2014/main" id="{A3FF5A66-2E21-D0BD-DF14-6789E8FB1D28}"/>
               </a:ext>
             </a:extLst>
           </p:cNvPr>
@@ -7297,7 +7535,7 @@
         <p:spPr>
           <a:xfrm>
             <a:off x="677334" y="609600"/>
-            <a:ext cx="8596668" cy="686540"/>
+            <a:ext cx="8596668" cy="757561"/>
           </a:xfrm>
         </p:spPr>
         <p:txBody>
@@ -7306,11 +7544,7 @@
           <a:p>
             <a:r>
               <a:rPr lang="ru-RU" b="1" dirty="0"/>
-              <a:t>Где можно использовать </a:t>
-            </a:r>
-            <a:r>
-              <a:rPr lang="en-US" b="1" dirty="0"/>
-              <a:t>Jamba</a:t>
+              <a:t>Ключевые преимущества</a:t>
             </a:r>
             <a:endParaRPr lang="ru-RU" dirty="0"/>
           </a:p>
@@ -7321,7 +7555,7 @@
           <p:cNvPr id="3" name="Объект 2">
             <a:extLst>
               <a:ext uri="{FF2B5EF4-FFF2-40B4-BE49-F238E27FC236}">
-                <a16:creationId xmlns:a16="http://schemas.microsoft.com/office/drawing/2014/main" id="{9666A396-9847-BD36-BC65-40ED63F68BFF}"/>
+                <a16:creationId xmlns:a16="http://schemas.microsoft.com/office/drawing/2014/main" id="{46FC2F49-9872-95FB-DC49-C632AD60DCE2}"/>
               </a:ext>
             </a:extLst>
           </p:cNvPr>
@@ -7334,128 +7568,57 @@
         </p:nvSpPr>
         <p:spPr>
           <a:xfrm>
-            <a:off x="677334" y="1393794"/>
-            <a:ext cx="8596668" cy="4854605"/>
+            <a:off x="677334" y="1464817"/>
+            <a:ext cx="8596668" cy="4918228"/>
           </a:xfrm>
         </p:spPr>
         <p:txBody>
-          <a:bodyPr/>
-          <a:lstStyle/>
-          <a:p>
-            <a:pPr marL="0" indent="0">
-              <a:buNone/>
-            </a:pPr>
+          <a:bodyPr>
+            <a:noAutofit/>
+          </a:bodyPr>
+          <a:lstStyle/>
+          <a:p>
+            <a:r>
+              <a:rPr lang="ru-RU" sz="2400" b="1" dirty="0"/>
+              <a:t>Безопасность и конфиденциальность:</a:t>
+            </a:r>
             <a:r>
               <a:rPr lang="ru-RU" sz="2400" dirty="0"/>
-              <a:t>Благодаря своей открытости, Jamba доступна на множестве платформ:</a:t>
+              <a:t> Возможность запускать модель в собственной инфраструктуре (</a:t>
+            </a:r>
+            <a:r>
+              <a:rPr lang="ru-RU" sz="2400" dirty="0" err="1"/>
+              <a:t>on-premises</a:t>
+            </a:r>
+            <a:r>
+              <a:rPr lang="ru-RU" sz="2400" dirty="0"/>
+              <a:t>) гарантирует, что корпоративные данные не покинут периметр компании.</a:t>
             </a:r>
           </a:p>
           <a:p>
             <a:r>
               <a:rPr lang="ru-RU" sz="2400" b="1" dirty="0"/>
-              <a:t>Прямая загрузка:</a:t>
+              <a:t>Универсальность:</a:t>
             </a:r>
             <a:r>
               <a:rPr lang="ru-RU" sz="2400" dirty="0"/>
-              <a:t> Модели можно скачать с портала </a:t>
-            </a:r>
-            <a:r>
-              <a:rPr lang="ru-RU" sz="2400" b="1" dirty="0" err="1"/>
-              <a:t>Hugging</a:t>
-            </a:r>
-            <a:r>
-              <a:rPr lang="ru-RU" sz="2400" b="1" dirty="0"/>
-              <a:t> Face</a:t>
+              <a:t> Jamba подходит для широчайшего круга задач: от анализа многотомной документации и юридических контрактов до создания ИИ-ассистентов и обработки запросов в контакт-центрах. Компактные версии, такие как Jamba </a:t>
+            </a:r>
+            <a:r>
+              <a:rPr lang="ru-RU" sz="2400" dirty="0" err="1"/>
+              <a:t>Reasoning</a:t>
             </a:r>
             <a:r>
               <a:rPr lang="ru-RU" sz="2400" dirty="0"/>
-              <a:t> .</a:t>
-            </a:r>
-          </a:p>
-          <a:p>
-            <a:r>
-              <a:rPr lang="ru-RU" sz="2400" b="1" dirty="0"/>
-              <a:t>Облачные платформы:</a:t>
-            </a:r>
-            <a:r>
-              <a:rPr lang="ru-RU" sz="2400" dirty="0"/>
-              <a:t> Jamba интегрирована с ведущими облачными провайдерами, такими как </a:t>
-            </a:r>
-            <a:r>
-              <a:rPr lang="ru-RU" sz="2400" b="1" dirty="0"/>
-              <a:t>Microsoft Azure</a:t>
-            </a:r>
-            <a:r>
-              <a:rPr lang="ru-RU" sz="2400" dirty="0"/>
-              <a:t>, </a:t>
-            </a:r>
-            <a:r>
-              <a:rPr lang="ru-RU" sz="2400" b="1" dirty="0"/>
-              <a:t>Google </a:t>
-            </a:r>
-            <a:r>
-              <a:rPr lang="ru-RU" sz="2400" b="1" dirty="0" err="1"/>
-              <a:t>Cloud</a:t>
-            </a:r>
-            <a:r>
-              <a:rPr lang="ru-RU" sz="2400" b="1" dirty="0"/>
-              <a:t> </a:t>
-            </a:r>
-            <a:r>
-              <a:rPr lang="ru-RU" sz="2400" b="1" dirty="0" err="1"/>
-              <a:t>Vertex</a:t>
-            </a:r>
-            <a:r>
-              <a:rPr lang="ru-RU" sz="2400" b="1" dirty="0"/>
-              <a:t> AI</a:t>
-            </a:r>
-            <a:r>
-              <a:rPr lang="ru-RU" sz="2400" dirty="0"/>
-              <a:t>, и доступна в каталогах </a:t>
-            </a:r>
-            <a:r>
-              <a:rPr lang="ru-RU" sz="2400" b="1" dirty="0"/>
-              <a:t>Amazon </a:t>
-            </a:r>
-            <a:r>
-              <a:rPr lang="ru-RU" sz="2400" b="1" dirty="0" err="1"/>
-              <a:t>Bedrock</a:t>
-            </a:r>
-            <a:r>
-              <a:rPr lang="ru-RU" sz="2400" dirty="0"/>
-              <a:t> и </a:t>
-            </a:r>
-            <a:r>
-              <a:rPr lang="ru-RU" sz="2400" b="1" dirty="0"/>
-              <a:t>NVIDIA API</a:t>
-            </a:r>
-            <a:r>
-              <a:rPr lang="ru-RU" sz="2400" dirty="0"/>
-              <a:t> .</a:t>
-            </a:r>
-          </a:p>
-          <a:p>
-            <a:r>
-              <a:rPr lang="ru-RU" sz="2400" b="1" dirty="0"/>
-              <a:t>Собственная инфраструктура:</a:t>
-            </a:r>
-            <a:r>
-              <a:rPr lang="ru-RU" sz="2400" dirty="0"/>
-              <a:t> Благодаря лицензии Apache 2.0, вы можете развернуть модель на своих собственных серверах .</a:t>
-            </a:r>
-          </a:p>
-          <a:p>
-            <a:pPr marL="0" indent="0">
-              <a:buNone/>
-            </a:pPr>
-            <a:endParaRPr lang="ru-RU" dirty="0"/>
+              <a:t> 3B, открывают эру децентрализованного ИИ, выполняя множество задач прямо на смартфонах и компьютерах пользователей, обращаясь к большим моделям в облаке только для самых сложных случаев.</a:t>
+            </a:r>
           </a:p>
         </p:txBody>
       </p:sp>
     </p:spTree>
     <p:extLst>
       <p:ext uri="{BB962C8B-B14F-4D97-AF65-F5344CB8AC3E}">
-        <p14:creationId xmlns:p14="http://schemas.microsoft.com/office/powerpoint/2010/main" val="2312120340"/>
+        <p14:creationId xmlns:p14="http://schemas.microsoft.com/office/powerpoint/2010/main" val="719343752"/>
       </p:ext>
     </p:extLst>
   </p:cSld>
